--- a/構成図.pptx
+++ b/構成図.pptx
@@ -15556,6 +15556,7 @@
           </a:bodyPr>
           <a:lstStyle/>
           <a:p>
+            <a:pPr algn="r"/>
             <a:r>
               <a:rPr kumimoji="1" lang="en-US" altLang="ja-JP" dirty="0"/>
               <a:t>API</a:t>
